--- a/chapter10/parts/part-08-use-cases-healthcare-finance/clip.pptx
+++ b/chapter10/parts/part-08-use-cases-healthcare-finance/clip.pptx
@@ -4468,10 +4468,12 @@
           </a:bodyPr>
           <a:lstStyle/>
           <a:p>
-            <a:pPr>
+            <a:pPr lvl="0" marL="457200" indent="-228600">
+              <a:buFont typeface="Calibri"/>
               <a:spcAft>
                 <a:spcPts val="1000"/>
               </a:spcAft>
+              <a:buSzPct val="100000"/>
               <a:buChar char="•"/>
               <a:lnSpc>
                 <a:spcPts val="2200"/>
@@ -4488,10 +4490,12 @@
             </a:r>
           </a:p>
           <a:p>
-            <a:pPr>
+            <a:pPr lvl="0" marL="457200" indent="-228600">
+              <a:buFont typeface="Calibri"/>
               <a:spcAft>
                 <a:spcPts val="1000"/>
               </a:spcAft>
+              <a:buSzPct val="100000"/>
               <a:buChar char="•"/>
               <a:lnSpc>
                 <a:spcPts val="2200"/>
@@ -4627,10 +4631,12 @@
           </a:bodyPr>
           <a:lstStyle/>
           <a:p>
-            <a:pPr>
+            <a:pPr lvl="0" marL="457200" indent="-228600">
+              <a:buFont typeface="Calibri"/>
               <a:spcAft>
                 <a:spcPts val="1000"/>
               </a:spcAft>
+              <a:buSzPct val="100000"/>
               <a:buChar char="•"/>
               <a:lnSpc>
                 <a:spcPts val="2200"/>
@@ -4647,10 +4653,12 @@
             </a:r>
           </a:p>
           <a:p>
-            <a:pPr>
+            <a:pPr lvl="0" marL="457200" indent="-228600">
+              <a:buFont typeface="Calibri"/>
               <a:spcAft>
                 <a:spcPts val="1000"/>
               </a:spcAft>
+              <a:buSzPct val="100000"/>
               <a:buChar char="•"/>
               <a:lnSpc>
                 <a:spcPts val="2200"/>
@@ -4667,10 +4675,12 @@
             </a:r>
           </a:p>
           <a:p>
-            <a:pPr>
+            <a:pPr lvl="0" marL="457200" indent="-228600">
+              <a:buFont typeface="Calibri"/>
               <a:spcAft>
                 <a:spcPts val="1000"/>
               </a:spcAft>
+              <a:buSzPct val="100000"/>
               <a:buChar char="•"/>
               <a:lnSpc>
                 <a:spcPts val="2200"/>
@@ -4806,10 +4816,12 @@
           </a:bodyPr>
           <a:lstStyle/>
           <a:p>
-            <a:pPr>
+            <a:pPr lvl="0" marL="457200" indent="-228600">
+              <a:buFont typeface="Calibri"/>
               <a:spcAft>
                 <a:spcPts val="1000"/>
               </a:spcAft>
+              <a:buSzPct val="100000"/>
               <a:buChar char="•"/>
               <a:lnSpc>
                 <a:spcPts val="2200"/>
@@ -4826,10 +4838,12 @@
             </a:r>
           </a:p>
           <a:p>
-            <a:pPr>
+            <a:pPr lvl="0" marL="457200" indent="-228600">
+              <a:buFont typeface="Calibri"/>
               <a:spcAft>
                 <a:spcPts val="1000"/>
               </a:spcAft>
+              <a:buSzPct val="100000"/>
               <a:buChar char="•"/>
               <a:lnSpc>
                 <a:spcPts val="2200"/>
@@ -4965,10 +4979,12 @@
           </a:bodyPr>
           <a:lstStyle/>
           <a:p>
-            <a:pPr>
+            <a:pPr lvl="0" marL="457200" indent="-228600">
+              <a:buFont typeface="Calibri"/>
               <a:spcAft>
                 <a:spcPts val="1000"/>
               </a:spcAft>
+              <a:buSzPct val="100000"/>
               <a:buChar char="•"/>
               <a:lnSpc>
                 <a:spcPts val="2200"/>
@@ -5104,10 +5120,12 @@
           </a:bodyPr>
           <a:lstStyle/>
           <a:p>
-            <a:pPr>
+            <a:pPr lvl="0" marL="457200" indent="-228600">
+              <a:buFont typeface="Calibri"/>
               <a:spcAft>
                 <a:spcPts val="1000"/>
               </a:spcAft>
+              <a:buSzPct val="100000"/>
               <a:buChar char="•"/>
               <a:lnSpc>
                 <a:spcPts val="2200"/>
@@ -5124,10 +5142,12 @@
             </a:r>
           </a:p>
           <a:p>
-            <a:pPr>
+            <a:pPr lvl="0" marL="457200" indent="-228600">
+              <a:buFont typeface="Calibri"/>
               <a:spcAft>
                 <a:spcPts val="1000"/>
               </a:spcAft>
+              <a:buSzPct val="100000"/>
               <a:buChar char="•"/>
               <a:lnSpc>
                 <a:spcPts val="2200"/>
@@ -5144,10 +5164,12 @@
             </a:r>
           </a:p>
           <a:p>
-            <a:pPr>
+            <a:pPr lvl="0" marL="457200" indent="-228600">
+              <a:buFont typeface="Calibri"/>
               <a:spcAft>
                 <a:spcPts val="1000"/>
               </a:spcAft>
+              <a:buSzPct val="100000"/>
               <a:buChar char="•"/>
               <a:lnSpc>
                 <a:spcPts val="2200"/>
@@ -5283,10 +5305,12 @@
           </a:bodyPr>
           <a:lstStyle/>
           <a:p>
-            <a:pPr>
+            <a:pPr lvl="0" marL="457200" indent="-228600">
+              <a:buFont typeface="Calibri"/>
               <a:spcAft>
                 <a:spcPts val="1000"/>
               </a:spcAft>
+              <a:buSzPct val="100000"/>
               <a:buChar char="•"/>
               <a:lnSpc>
                 <a:spcPts val="2200"/>
@@ -5303,10 +5327,12 @@
             </a:r>
           </a:p>
           <a:p>
-            <a:pPr>
+            <a:pPr lvl="0" marL="457200" indent="-228600">
+              <a:buFont typeface="Calibri"/>
               <a:spcAft>
                 <a:spcPts val="1000"/>
               </a:spcAft>
+              <a:buSzPct val="100000"/>
               <a:buChar char="•"/>
               <a:lnSpc>
                 <a:spcPts val="2200"/>
@@ -5323,10 +5349,12 @@
             </a:r>
           </a:p>
           <a:p>
-            <a:pPr>
+            <a:pPr lvl="0" marL="457200" indent="-228600">
+              <a:buFont typeface="Calibri"/>
               <a:spcAft>
                 <a:spcPts val="1000"/>
               </a:spcAft>
+              <a:buSzPct val="100000"/>
               <a:buChar char="•"/>
               <a:lnSpc>
                 <a:spcPts val="2200"/>
@@ -5343,10 +5371,12 @@
             </a:r>
           </a:p>
           <a:p>
-            <a:pPr>
+            <a:pPr lvl="0" marL="457200" indent="-228600">
+              <a:buFont typeface="Calibri"/>
               <a:spcAft>
                 <a:spcPts val="1000"/>
               </a:spcAft>
+              <a:buSzPct val="100000"/>
               <a:buChar char="•"/>
               <a:lnSpc>
                 <a:spcPts val="2200"/>
@@ -5363,10 +5393,12 @@
             </a:r>
           </a:p>
           <a:p>
-            <a:pPr>
+            <a:pPr lvl="0" marL="457200" indent="-228600">
+              <a:buFont typeface="Calibri"/>
               <a:spcAft>
                 <a:spcPts val="1000"/>
               </a:spcAft>
+              <a:buSzPct val="100000"/>
               <a:buChar char="•"/>
               <a:lnSpc>
                 <a:spcPts val="2200"/>
@@ -5502,10 +5534,12 @@
           </a:bodyPr>
           <a:lstStyle/>
           <a:p>
-            <a:pPr>
+            <a:pPr lvl="0" marL="457200" indent="-228600">
+              <a:buFont typeface="Calibri"/>
               <a:spcAft>
                 <a:spcPts val="1000"/>
               </a:spcAft>
+              <a:buSzPct val="100000"/>
               <a:buChar char="•"/>
               <a:lnSpc>
                 <a:spcPts val="2200"/>
@@ -5522,10 +5556,12 @@
             </a:r>
           </a:p>
           <a:p>
-            <a:pPr>
+            <a:pPr lvl="0" marL="457200" indent="-228600">
+              <a:buFont typeface="Calibri"/>
               <a:spcAft>
                 <a:spcPts val="1000"/>
               </a:spcAft>
+              <a:buSzPct val="100000"/>
               <a:buChar char="•"/>
               <a:lnSpc>
                 <a:spcPts val="2200"/>
@@ -5542,10 +5578,12 @@
             </a:r>
           </a:p>
           <a:p>
-            <a:pPr>
+            <a:pPr lvl="0" marL="457200" indent="-228600">
+              <a:buFont typeface="Calibri"/>
               <a:spcAft>
                 <a:spcPts val="1000"/>
               </a:spcAft>
+              <a:buSzPct val="100000"/>
               <a:buChar char="•"/>
               <a:lnSpc>
                 <a:spcPts val="2200"/>
@@ -5681,10 +5719,12 @@
           </a:bodyPr>
           <a:lstStyle/>
           <a:p>
-            <a:pPr>
+            <a:pPr lvl="0" marL="457200" indent="-228600">
+              <a:buFont typeface="Calibri"/>
               <a:spcAft>
                 <a:spcPts val="1000"/>
               </a:spcAft>
+              <a:buSzPct val="100000"/>
               <a:buChar char="•"/>
               <a:lnSpc>
                 <a:spcPts val="2200"/>
@@ -5701,10 +5741,12 @@
             </a:r>
           </a:p>
           <a:p>
-            <a:pPr>
+            <a:pPr lvl="0" marL="457200" indent="-228600">
+              <a:buFont typeface="Calibri"/>
               <a:spcAft>
                 <a:spcPts val="1000"/>
               </a:spcAft>
+              <a:buSzPct val="100000"/>
               <a:buChar char="•"/>
               <a:lnSpc>
                 <a:spcPts val="2200"/>
@@ -5721,10 +5763,12 @@
             </a:r>
           </a:p>
           <a:p>
-            <a:pPr>
+            <a:pPr lvl="0" marL="457200" indent="-228600">
+              <a:buFont typeface="Calibri"/>
               <a:spcAft>
                 <a:spcPts val="1000"/>
               </a:spcAft>
+              <a:buSzPct val="100000"/>
               <a:buChar char="•"/>
               <a:lnSpc>
                 <a:spcPts val="2200"/>
@@ -5741,10 +5785,12 @@
             </a:r>
           </a:p>
           <a:p>
-            <a:pPr>
+            <a:pPr lvl="0" marL="457200" indent="-228600">
+              <a:buFont typeface="Calibri"/>
               <a:spcAft>
                 <a:spcPts val="1000"/>
               </a:spcAft>
+              <a:buSzPct val="100000"/>
               <a:buChar char="•"/>
               <a:lnSpc>
                 <a:spcPts val="2200"/>
@@ -5880,10 +5926,12 @@
           </a:bodyPr>
           <a:lstStyle/>
           <a:p>
-            <a:pPr>
+            <a:pPr lvl="0" marL="457200" indent="-228600">
+              <a:buFont typeface="Calibri"/>
               <a:spcAft>
                 <a:spcPts val="1000"/>
               </a:spcAft>
+              <a:buSzPct val="100000"/>
               <a:buChar char="•"/>
               <a:lnSpc>
                 <a:spcPts val="2200"/>
@@ -5900,10 +5948,12 @@
             </a:r>
           </a:p>
           <a:p>
-            <a:pPr>
+            <a:pPr lvl="0" marL="457200" indent="-228600">
+              <a:buFont typeface="Calibri"/>
               <a:spcAft>
                 <a:spcPts val="1000"/>
               </a:spcAft>
+              <a:buSzPct val="100000"/>
               <a:buChar char="•"/>
               <a:lnSpc>
                 <a:spcPts val="2200"/>
@@ -6039,10 +6089,12 @@
           </a:bodyPr>
           <a:lstStyle/>
           <a:p>
-            <a:pPr>
+            <a:pPr lvl="0" marL="457200" indent="-228600">
+              <a:buFont typeface="Calibri"/>
               <a:spcAft>
                 <a:spcPts val="1000"/>
               </a:spcAft>
+              <a:buSzPct val="100000"/>
               <a:buChar char="•"/>
               <a:lnSpc>
                 <a:spcPts val="2200"/>
@@ -6059,10 +6111,12 @@
             </a:r>
           </a:p>
           <a:p>
-            <a:pPr>
+            <a:pPr lvl="0" marL="457200" indent="-228600">
+              <a:buFont typeface="Calibri"/>
               <a:spcAft>
                 <a:spcPts val="1000"/>
               </a:spcAft>
+              <a:buSzPct val="100000"/>
               <a:buChar char="•"/>
               <a:lnSpc>
                 <a:spcPts val="2200"/>
@@ -6198,10 +6252,12 @@
           </a:bodyPr>
           <a:lstStyle/>
           <a:p>
-            <a:pPr>
+            <a:pPr lvl="0" marL="457200" indent="-228600">
+              <a:buFont typeface="Calibri"/>
               <a:spcAft>
                 <a:spcPts val="1000"/>
               </a:spcAft>
+              <a:buSzPct val="100000"/>
               <a:buChar char="•"/>
               <a:lnSpc>
                 <a:spcPts val="2200"/>
@@ -6218,10 +6274,12 @@
             </a:r>
           </a:p>
           <a:p>
-            <a:pPr>
+            <a:pPr lvl="0" marL="457200" indent="-228600">
+              <a:buFont typeface="Calibri"/>
               <a:spcAft>
                 <a:spcPts val="1000"/>
               </a:spcAft>
+              <a:buSzPct val="100000"/>
               <a:buChar char="•"/>
               <a:lnSpc>
                 <a:spcPts val="2200"/>
@@ -6238,10 +6296,12 @@
             </a:r>
           </a:p>
           <a:p>
-            <a:pPr>
+            <a:pPr lvl="0" marL="457200" indent="-228600">
+              <a:buFont typeface="Calibri"/>
               <a:spcAft>
                 <a:spcPts val="1000"/>
               </a:spcAft>
+              <a:buSzPct val="100000"/>
               <a:buChar char="•"/>
               <a:lnSpc>
                 <a:spcPts val="2200"/>
@@ -6258,10 +6318,12 @@
             </a:r>
           </a:p>
           <a:p>
-            <a:pPr>
+            <a:pPr lvl="0" marL="457200" indent="-228600">
+              <a:buFont typeface="Calibri"/>
               <a:spcAft>
                 <a:spcPts val="1000"/>
               </a:spcAft>
+              <a:buSzPct val="100000"/>
               <a:buChar char="•"/>
               <a:lnSpc>
                 <a:spcPts val="2200"/>
@@ -6278,10 +6340,12 @@
             </a:r>
           </a:p>
           <a:p>
-            <a:pPr>
+            <a:pPr lvl="0" marL="457200" indent="-228600">
+              <a:buFont typeface="Calibri"/>
               <a:spcAft>
                 <a:spcPts val="1000"/>
               </a:spcAft>
+              <a:buSzPct val="100000"/>
               <a:buChar char="•"/>
               <a:lnSpc>
                 <a:spcPts val="2200"/>
